--- a/0A. Neurobiology Refresher.pptx
+++ b/0A. Neurobiology Refresher.pptx
@@ -119,7 +119,7 @@
 <file path=ppt/revisionInfo.xml><?xml version="1.0" encoding="utf-8"?>
 <p1510:revInfo xmlns:a="http://schemas.openxmlformats.org/drawingml/2006/main" xmlns:r="http://schemas.openxmlformats.org/officeDocument/2006/relationships" xmlns:p1510="http://schemas.microsoft.com/office/powerpoint/2015/10/main">
   <p1510:revLst>
-    <p1510:client id="{271588CA-04A0-41CC-8F91-3F128B75ECD2}" v="69" dt="2026-03-23T00:30:33.882"/>
+    <p1510:client id="{271588CA-04A0-41CC-8F91-3F128B75ECD2}" v="74" dt="2026-03-23T18:11:48.034"/>
   </p1510:revLst>
 </p1510:revInfo>
 </file>
@@ -129,12 +129,12 @@
   <pc:docChgLst>
     <pc:chgData name="Nair, Satish" userId="af50c098-07d3-4545-ad93-15c24b849386" providerId="ADAL" clId="{B575728E-D61F-49E0-BC8E-8DC5242C7AE2}"/>
     <pc:docChg chg="undo redo custSel addSld modSld">
-      <pc:chgData name="Nair, Satish" userId="af50c098-07d3-4545-ad93-15c24b849386" providerId="ADAL" clId="{B575728E-D61F-49E0-BC8E-8DC5242C7AE2}" dt="2026-03-23T05:47:04.450" v="1569" actId="20577"/>
+      <pc:chgData name="Nair, Satish" userId="af50c098-07d3-4545-ad93-15c24b849386" providerId="ADAL" clId="{B575728E-D61F-49E0-BC8E-8DC5242C7AE2}" dt="2026-03-23T18:11:48.034" v="1586"/>
       <pc:docMkLst>
         <pc:docMk/>
       </pc:docMkLst>
       <pc:sldChg chg="addSp delSp modSp new mod">
-        <pc:chgData name="Nair, Satish" userId="af50c098-07d3-4545-ad93-15c24b849386" providerId="ADAL" clId="{B575728E-D61F-49E0-BC8E-8DC5242C7AE2}" dt="2026-03-23T05:47:04.450" v="1569" actId="20577"/>
+        <pc:chgData name="Nair, Satish" userId="af50c098-07d3-4545-ad93-15c24b849386" providerId="ADAL" clId="{B575728E-D61F-49E0-BC8E-8DC5242C7AE2}" dt="2026-03-23T18:11:48.034" v="1586"/>
         <pc:sldMkLst>
           <pc:docMk/>
           <pc:sldMk cId="1764206999" sldId="256"/>
@@ -148,7 +148,7 @@
           </ac:spMkLst>
         </pc:spChg>
         <pc:spChg chg="add del mod">
-          <ac:chgData name="Nair, Satish" userId="af50c098-07d3-4545-ad93-15c24b849386" providerId="ADAL" clId="{B575728E-D61F-49E0-BC8E-8DC5242C7AE2}" dt="2026-03-23T05:47:04.450" v="1569" actId="20577"/>
+          <ac:chgData name="Nair, Satish" userId="af50c098-07d3-4545-ad93-15c24b849386" providerId="ADAL" clId="{B575728E-D61F-49E0-BC8E-8DC5242C7AE2}" dt="2026-03-23T18:11:48.034" v="1586"/>
           <ac:spMkLst>
             <pc:docMk/>
             <pc:sldMk cId="1764206999" sldId="256"/>
@@ -4182,12 +4182,22 @@
               <a:t>: Click on the following link - </a:t>
             </a:r>
             <a:r>
-              <a:rPr lang="en-US" altLang="en-US" sz="1700" dirty="0" err="1">
+              <a:rPr lang="en-US" dirty="0"/>
+              <a:t> </a:t>
+            </a:r>
+            <a:r>
+              <a:rPr lang="en-US" u="sng">
+                <a:hlinkClick r:id="rId2"/>
+              </a:rPr>
+              <a:t>Colab_A</a:t>
+            </a:r>
+            <a:r>
+              <a:rPr lang="en-US" altLang="en-US" sz="1700">
                 <a:latin typeface="+mn-lt"/>
                 <a:ea typeface="Times New Roman" panose="02020603050405020304" pitchFamily="18" charset="0"/>
                 <a:cs typeface="Times New Roman" panose="02020603050405020304" pitchFamily="18" charset="0"/>
               </a:rPr>
-              <a:t>Colab_A</a:t>
+              <a:t> and </a:t>
             </a:r>
             <a:r>
               <a:rPr lang="en-US" altLang="en-US" sz="1700" dirty="0">
@@ -4195,7 +4205,7 @@
                 <a:ea typeface="Times New Roman" panose="02020603050405020304" pitchFamily="18" charset="0"/>
                 <a:cs typeface="Times New Roman" panose="02020603050405020304" pitchFamily="18" charset="0"/>
               </a:rPr>
-              <a:t> and complete the sequentially ar</a:t>
+              <a:t>complete the sequentially ar</a:t>
             </a:r>
             <a:r>
               <a:rPr lang="en-US" altLang="en-US" sz="1700" dirty="0">
